--- a/reference_doc/pcie/notebook/PCIE协议-软件初始化&配置-3.0.pptx
+++ b/reference_doc/pcie/notebook/PCIE协议-软件初始化&配置-3.0.pptx
@@ -267,7 +267,7 @@
           <a:p>
             <a:fld id="{716681A8-D776-4DAA-A457-C5C78A8DE198}" type="datetimeFigureOut">
               <a:rPr lang="zh-CN" altLang="en-US" smtClean="0"/>
-              <a:t>2025/5/12</a:t>
+              <a:t>2025/5/30</a:t>
             </a:fld>
             <a:endParaRPr lang="zh-CN" altLang="en-US"/>
           </a:p>
@@ -465,7 +465,7 @@
           <a:p>
             <a:fld id="{716681A8-D776-4DAA-A457-C5C78A8DE198}" type="datetimeFigureOut">
               <a:rPr lang="zh-CN" altLang="en-US" smtClean="0"/>
-              <a:t>2025/5/12</a:t>
+              <a:t>2025/5/30</a:t>
             </a:fld>
             <a:endParaRPr lang="zh-CN" altLang="en-US"/>
           </a:p>
@@ -673,7 +673,7 @@
           <a:p>
             <a:fld id="{716681A8-D776-4DAA-A457-C5C78A8DE198}" type="datetimeFigureOut">
               <a:rPr lang="zh-CN" altLang="en-US" smtClean="0"/>
-              <a:t>2025/5/12</a:t>
+              <a:t>2025/5/30</a:t>
             </a:fld>
             <a:endParaRPr lang="zh-CN" altLang="en-US"/>
           </a:p>
@@ -871,7 +871,7 @@
           <a:p>
             <a:fld id="{716681A8-D776-4DAA-A457-C5C78A8DE198}" type="datetimeFigureOut">
               <a:rPr lang="zh-CN" altLang="en-US" smtClean="0"/>
-              <a:t>2025/5/12</a:t>
+              <a:t>2025/5/30</a:t>
             </a:fld>
             <a:endParaRPr lang="zh-CN" altLang="en-US"/>
           </a:p>
@@ -1146,7 +1146,7 @@
           <a:p>
             <a:fld id="{716681A8-D776-4DAA-A457-C5C78A8DE198}" type="datetimeFigureOut">
               <a:rPr lang="zh-CN" altLang="en-US" smtClean="0"/>
-              <a:t>2025/5/12</a:t>
+              <a:t>2025/5/30</a:t>
             </a:fld>
             <a:endParaRPr lang="zh-CN" altLang="en-US"/>
           </a:p>
@@ -1411,7 +1411,7 @@
           <a:p>
             <a:fld id="{716681A8-D776-4DAA-A457-C5C78A8DE198}" type="datetimeFigureOut">
               <a:rPr lang="zh-CN" altLang="en-US" smtClean="0"/>
-              <a:t>2025/5/12</a:t>
+              <a:t>2025/5/30</a:t>
             </a:fld>
             <a:endParaRPr lang="zh-CN" altLang="en-US"/>
           </a:p>
@@ -1823,7 +1823,7 @@
           <a:p>
             <a:fld id="{716681A8-D776-4DAA-A457-C5C78A8DE198}" type="datetimeFigureOut">
               <a:rPr lang="zh-CN" altLang="en-US" smtClean="0"/>
-              <a:t>2025/5/12</a:t>
+              <a:t>2025/5/30</a:t>
             </a:fld>
             <a:endParaRPr lang="zh-CN" altLang="en-US"/>
           </a:p>
@@ -1964,7 +1964,7 @@
           <a:p>
             <a:fld id="{716681A8-D776-4DAA-A457-C5C78A8DE198}" type="datetimeFigureOut">
               <a:rPr lang="zh-CN" altLang="en-US" smtClean="0"/>
-              <a:t>2025/5/12</a:t>
+              <a:t>2025/5/30</a:t>
             </a:fld>
             <a:endParaRPr lang="zh-CN" altLang="en-US"/>
           </a:p>
@@ -2077,7 +2077,7 @@
           <a:p>
             <a:fld id="{716681A8-D776-4DAA-A457-C5C78A8DE198}" type="datetimeFigureOut">
               <a:rPr lang="zh-CN" altLang="en-US" smtClean="0"/>
-              <a:t>2025/5/12</a:t>
+              <a:t>2025/5/30</a:t>
             </a:fld>
             <a:endParaRPr lang="zh-CN" altLang="en-US"/>
           </a:p>
@@ -2388,7 +2388,7 @@
           <a:p>
             <a:fld id="{716681A8-D776-4DAA-A457-C5C78A8DE198}" type="datetimeFigureOut">
               <a:rPr lang="zh-CN" altLang="en-US" smtClean="0"/>
-              <a:t>2025/5/12</a:t>
+              <a:t>2025/5/30</a:t>
             </a:fld>
             <a:endParaRPr lang="zh-CN" altLang="en-US"/>
           </a:p>
@@ -2676,7 +2676,7 @@
           <a:p>
             <a:fld id="{716681A8-D776-4DAA-A457-C5C78A8DE198}" type="datetimeFigureOut">
               <a:rPr lang="zh-CN" altLang="en-US" smtClean="0"/>
-              <a:t>2025/5/12</a:t>
+              <a:t>2025/5/30</a:t>
             </a:fld>
             <a:endParaRPr lang="zh-CN" altLang="en-US"/>
           </a:p>
@@ -2917,7 +2917,7 @@
           <a:p>
             <a:fld id="{716681A8-D776-4DAA-A457-C5C78A8DE198}" type="datetimeFigureOut">
               <a:rPr lang="zh-CN" altLang="en-US" smtClean="0"/>
-              <a:t>2025/5/12</a:t>
+              <a:t>2025/5/30</a:t>
             </a:fld>
             <a:endParaRPr lang="zh-CN" altLang="en-US"/>
           </a:p>
@@ -3355,32 +3355,22 @@
           <a:bodyPr/>
           <a:lstStyle/>
           <a:p>
-            <a:endParaRPr lang="zh-CN" altLang="en-US"/>
-          </a:p>
-        </p:txBody>
-      </p:sp>
-      <p:sp>
-        <p:nvSpPr>
-          <p:cNvPr id="3" name="副标题 2">
-            <a:extLst>
-              <a:ext uri="{FF2B5EF4-FFF2-40B4-BE49-F238E27FC236}">
-                <a16:creationId xmlns:a16="http://schemas.microsoft.com/office/drawing/2014/main" id="{3C64507F-5F9B-C5D6-46FF-AC120A74AFC0}"/>
-              </a:ext>
-            </a:extLst>
-          </p:cNvPr>
-          <p:cNvSpPr>
-            <a:spLocks noGrp="1"/>
-          </p:cNvSpPr>
-          <p:nvPr>
-            <p:ph type="subTitle" idx="1"/>
-          </p:nvPr>
-        </p:nvSpPr>
-        <p:spPr/>
-        <p:txBody>
-          <a:bodyPr/>
-          <a:lstStyle/>
-          <a:p>
-            <a:endParaRPr lang="zh-CN" altLang="en-US"/>
+            <a:r>
+              <a:rPr lang="en-US" altLang="zh-CN" dirty="0"/>
+              <a:t>PCIE</a:t>
+            </a:r>
+            <a:r>
+              <a:rPr lang="zh-CN" altLang="en-US" dirty="0"/>
+              <a:t>软件初始化</a:t>
+            </a:r>
+            <a:r>
+              <a:rPr lang="en-US" altLang="zh-CN" dirty="0"/>
+              <a:t>&amp;</a:t>
+            </a:r>
+            <a:r>
+              <a:rPr lang="zh-CN" altLang="en-US" dirty="0"/>
+              <a:t>配置</a:t>
+            </a:r>
           </a:p>
         </p:txBody>
       </p:sp>
